--- a/writing/decks/02-verbs-and-the-fleet.pptx
+++ b/writing/decks/02-verbs-and-the-fleet.pptx
@@ -3189,7 +3189,7 @@
                 </a:solidFill>
                 <a:latin typeface="Consolas"/>
               </a:rPr>
-              <a:t>RATCHET · PART 2 OF 4</a:t>
+              <a:t>RATCHET · PART 2 OF 5</a:t>
             </a:r>
           </a:p>
         </p:txBody>
@@ -3301,7 +3301,7 @@
                 </a:solidFill>
                 <a:latin typeface="Calibri"/>
               </a:rPr>
-              <a:t>Part 2 of 4. Quick recap: a design doc gets broken into beads — small, independently verifiable units of work — and each one is driven through a fixed sequence of narrow model calls called verbs. This piece is about how that actually works.</a:t>
+              <a:t>Part 2 of 5. Quick recap: a design doc gets broken into beads — small, independently verifiable units of work — and each one is driven through a fixed sequence of narrow model calls called verbs. This piece is about how that actually works.</a:t>
             </a:r>
           </a:p>
         </p:txBody>
@@ -3447,6 +3447,50 @@
         <p:spPr>
           <a:xfrm>
             <a:off x="1828799" y="6263640"/>
+            <a:ext cx="146304" cy="146304"/>
+          </a:xfrm>
+          <a:prstGeom prst="ellipse">
+            <a:avLst/>
+          </a:prstGeom>
+          <a:solidFill>
+            <a:srgbClr val="3A3E44"/>
+          </a:solidFill>
+          <a:ln>
+            <a:noFill/>
+          </a:ln>
+          <a:effectLst/>
+        </p:spPr>
+        <p:style>
+          <a:lnRef idx="1">
+            <a:schemeClr val="accent1"/>
+          </a:lnRef>
+          <a:fillRef idx="3">
+            <a:schemeClr val="accent1"/>
+          </a:fillRef>
+          <a:effectRef idx="2">
+            <a:schemeClr val="accent1"/>
+          </a:effectRef>
+          <a:fontRef idx="minor">
+            <a:schemeClr val="lt1"/>
+          </a:fontRef>
+        </p:style>
+        <p:txBody>
+          <a:bodyPr rtlCol="0" anchor="ctr"/>
+          <a:lstStyle/>
+          <a:p>
+            <a:pPr algn="ctr"/>
+          </a:p>
+        </p:txBody>
+      </p:sp>
+      <p:sp>
+        <p:nvSpPr>
+          <p:cNvPr id="11" name="Oval 10"/>
+          <p:cNvSpPr/>
+          <p:nvPr/>
+        </p:nvSpPr>
+        <p:spPr>
+          <a:xfrm>
+            <a:off x="2148839" y="6263640"/>
             <a:ext cx="146304" cy="146304"/>
           </a:xfrm>
           <a:prstGeom prst="ellipse">
@@ -3716,7 +3760,7 @@
                 </a:solidFill>
                 <a:latin typeface="Consolas"/>
               </a:rPr>
-              <a:t>RATCHET · PART 2/4 · VERBS &amp; THE FLEET</a:t>
+              <a:t>RATCHET · PART 2/5 · VERBS &amp; THE FLEET</a:t>
             </a:r>
           </a:p>
           <a:p/>
@@ -4940,7 +4984,7 @@
                 </a:solidFill>
                 <a:latin typeface="Consolas"/>
               </a:rPr>
-              <a:t>RATCHET · PART 2/4 · VERBS &amp; THE FLEET</a:t>
+              <a:t>RATCHET · PART 2/5 · VERBS &amp; THE FLEET</a:t>
             </a:r>
           </a:p>
           <a:p/>
@@ -5249,7 +5293,7 @@
                 </a:solidFill>
                 <a:latin typeface="Consolas"/>
               </a:rPr>
-              <a:t>RATCHET · PART 2/4 · VERBS &amp; THE FLEET</a:t>
+              <a:t>RATCHET · PART 2/5 · VERBS &amp; THE FLEET</a:t>
             </a:r>
           </a:p>
           <a:p/>
@@ -5669,7 +5713,7 @@
                 </a:solidFill>
                 <a:latin typeface="Consolas"/>
               </a:rPr>
-              <a:t>RATCHET · PART 2/4 · VERBS &amp; THE FLEET</a:t>
+              <a:t>RATCHET · PART 2/5 · VERBS &amp; THE FLEET</a:t>
             </a:r>
           </a:p>
           <a:p/>
@@ -6070,7 +6114,7 @@
                 </a:solidFill>
                 <a:latin typeface="Consolas"/>
               </a:rPr>
-              <a:t>RATCHET · PART 2/4 · VERBS &amp; THE FLEET</a:t>
+              <a:t>RATCHET · PART 2/5 · VERBS &amp; THE FLEET</a:t>
             </a:r>
           </a:p>
           <a:p/>
@@ -6453,7 +6497,7 @@
                 </a:solidFill>
                 <a:latin typeface="Consolas"/>
               </a:rPr>
-              <a:t>RATCHET · PART 2/4 · VERBS &amp; THE FLEET</a:t>
+              <a:t>RATCHET · PART 2/5 · VERBS &amp; THE FLEET</a:t>
             </a:r>
           </a:p>
           <a:p/>
@@ -6808,7 +6852,7 @@
                 </a:solidFill>
                 <a:latin typeface="Consolas"/>
               </a:rPr>
-              <a:t>RATCHET · PART 2/4 · VERBS &amp; THE FLEET</a:t>
+              <a:t>RATCHET · PART 2/5 · VERBS &amp; THE FLEET</a:t>
             </a:r>
           </a:p>
           <a:p/>
@@ -7386,7 +7430,7 @@
                 </a:solidFill>
                 <a:latin typeface="Consolas"/>
               </a:rPr>
-              <a:t>RATCHET · PART 2/4 · VERBS &amp; THE FLEET</a:t>
+              <a:t>RATCHET · PART 2/5 · VERBS &amp; THE FLEET</a:t>
             </a:r>
           </a:p>
           <a:p/>
@@ -7710,7 +7754,7 @@
                 </a:solidFill>
                 <a:latin typeface="Consolas"/>
               </a:rPr>
-              <a:t>RATCHET · PART 2/4 · VERBS &amp; THE FLEET</a:t>
+              <a:t>RATCHET · PART 2/5 · VERBS &amp; THE FLEET</a:t>
             </a:r>
           </a:p>
           <a:p/>
@@ -8111,7 +8155,7 @@
                 </a:solidFill>
                 <a:latin typeface="Consolas"/>
               </a:rPr>
-              <a:t>RATCHET · PART 2/4 · VERBS &amp; THE FLEET</a:t>
+              <a:t>RATCHET · PART 2/5 · VERBS &amp; THE FLEET</a:t>
             </a:r>
           </a:p>
           <a:p/>
@@ -8503,7 +8547,7 @@
                 </a:solidFill>
                 <a:latin typeface="Consolas"/>
               </a:rPr>
-              <a:t>RATCHET · PART 2/4 · VERBS &amp; THE FLEET</a:t>
+              <a:t>RATCHET · PART 2/5 · VERBS &amp; THE FLEET</a:t>
             </a:r>
           </a:p>
           <a:p/>
@@ -9035,7 +9079,7 @@
                 </a:solidFill>
                 <a:latin typeface="Consolas"/>
               </a:rPr>
-              <a:t>RATCHET · PART 2/4 · VERBS &amp; THE FLEET</a:t>
+              <a:t>RATCHET · PART 2/5 · VERBS &amp; THE FLEET</a:t>
             </a:r>
           </a:p>
           <a:p/>
@@ -9359,7 +9403,7 @@
                 </a:solidFill>
                 <a:latin typeface="Consolas"/>
               </a:rPr>
-              <a:t>RATCHET · PART 2/4 · VERBS &amp; THE FLEET</a:t>
+              <a:t>RATCHET · PART 2/5 · VERBS &amp; THE FLEET</a:t>
             </a:r>
           </a:p>
           <a:p/>
@@ -9668,7 +9712,7 @@
                 </a:solidFill>
                 <a:latin typeface="Consolas"/>
               </a:rPr>
-              <a:t>RATCHET · PART 2/4 · VERBS &amp; THE FLEET</a:t>
+              <a:t>RATCHET · PART 2/5 · VERBS &amp; THE FLEET</a:t>
             </a:r>
           </a:p>
           <a:p/>
@@ -10088,7 +10132,7 @@
                 </a:solidFill>
                 <a:latin typeface="Consolas"/>
               </a:rPr>
-              <a:t>RATCHET · PART 2/4 · VERBS &amp; THE FLEET</a:t>
+              <a:t>RATCHET · PART 2/5 · VERBS &amp; THE FLEET</a:t>
             </a:r>
           </a:p>
           <a:p/>
@@ -10412,7 +10456,7 @@
                 </a:solidFill>
                 <a:latin typeface="Consolas"/>
               </a:rPr>
-              <a:t>RATCHET · PART 2/4 · VERBS &amp; THE FLEET</a:t>
+              <a:t>RATCHET · PART 2/5 · VERBS &amp; THE FLEET</a:t>
             </a:r>
           </a:p>
           <a:p/>
@@ -10823,7 +10867,7 @@
                 </a:solidFill>
                 <a:latin typeface="Consolas"/>
               </a:rPr>
-              <a:t>RATCHET · PART 2/4 · VERBS &amp; THE FLEET</a:t>
+              <a:t>RATCHET · PART 2/5 · VERBS &amp; THE FLEET</a:t>
             </a:r>
           </a:p>
           <a:p/>
@@ -11215,7 +11259,7 @@
                 </a:solidFill>
                 <a:latin typeface="Consolas"/>
               </a:rPr>
-              <a:t>RATCHET · PART 2/4 · VERBS &amp; THE FLEET</a:t>
+              <a:t>RATCHET · PART 2/5 · VERBS &amp; THE FLEET</a:t>
             </a:r>
           </a:p>
           <a:p/>
@@ -11598,7 +11642,7 @@
                 </a:solidFill>
                 <a:latin typeface="Consolas"/>
               </a:rPr>
-              <a:t>RATCHET · PART 2/4 · VERBS &amp; THE FLEET</a:t>
+              <a:t>RATCHET · PART 2/5 · VERBS &amp; THE FLEET</a:t>
             </a:r>
           </a:p>
           <a:p/>
@@ -11981,7 +12025,7 @@
                 </a:solidFill>
                 <a:latin typeface="Consolas"/>
               </a:rPr>
-              <a:t>RATCHET · PART 2/4 · VERBS &amp; THE FLEET</a:t>
+              <a:t>RATCHET · PART 2/5 · VERBS &amp; THE FLEET</a:t>
             </a:r>
           </a:p>
           <a:p/>
@@ -12269,7 +12313,7 @@
                 </a:solidFill>
                 <a:latin typeface="Calibri"/>
               </a:rPr>
-              <a:t>Write for Zero Domain Knowledge — the craft of writing a spec precise enough for a 30B model to build correctly on the first pass.</a:t>
+              <a:t>Format, Think, Turn — the wire-level mechanics of talking to this fleet over Ollama, and why almost none of it looks like calling Claude's API.</a:t>
             </a:r>
           </a:p>
         </p:txBody>
@@ -12303,7 +12347,7 @@
                 </a:solidFill>
                 <a:latin typeface="Consolas"/>
               </a:rPr>
-              <a:t>RATCHET · PART 2/4 · VERBS &amp; THE FLEET</a:t>
+              <a:t>RATCHET · PART 2/5 · VERBS &amp; THE FLEET</a:t>
             </a:r>
           </a:p>
         </p:txBody>
@@ -12714,7 +12758,7 @@
                 </a:solidFill>
                 <a:latin typeface="Consolas"/>
               </a:rPr>
-              <a:t>RATCHET · PART 2/4 · VERBS &amp; THE FLEET</a:t>
+              <a:t>RATCHET · PART 2/5 · VERBS &amp; THE FLEET</a:t>
             </a:r>
           </a:p>
           <a:p/>
@@ -13024,7 +13068,7 @@
                 </a:solidFill>
                 <a:latin typeface="Consolas"/>
               </a:rPr>
-              <a:t>RATCHET · PART 2/4 · VERBS &amp; THE FLEET</a:t>
+              <a:t>RATCHET · PART 2/5 · VERBS &amp; THE FLEET</a:t>
             </a:r>
           </a:p>
           <a:p/>
@@ -14266,7 +14310,7 @@
                 </a:solidFill>
                 <a:latin typeface="Consolas"/>
               </a:rPr>
-              <a:t>RATCHET · PART 2/4 · VERBS &amp; THE FLEET</a:t>
+              <a:t>RATCHET · PART 2/5 · VERBS &amp; THE FLEET</a:t>
             </a:r>
           </a:p>
           <a:p/>
@@ -14576,7 +14620,7 @@
                 </a:solidFill>
                 <a:latin typeface="Consolas"/>
               </a:rPr>
-              <a:t>RATCHET · PART 2/4 · VERBS &amp; THE FLEET</a:t>
+              <a:t>RATCHET · PART 2/5 · VERBS &amp; THE FLEET</a:t>
             </a:r>
           </a:p>
           <a:p/>
@@ -16266,7 +16310,7 @@
                 </a:solidFill>
                 <a:latin typeface="Consolas"/>
               </a:rPr>
-              <a:t>RATCHET · PART 2/4 · VERBS &amp; THE FLEET</a:t>
+              <a:t>RATCHET · PART 2/5 · VERBS &amp; THE FLEET</a:t>
             </a:r>
           </a:p>
           <a:p/>
@@ -16576,7 +16620,7 @@
                 </a:solidFill>
                 <a:latin typeface="Consolas"/>
               </a:rPr>
-              <a:t>RATCHET · PART 2/4 · VERBS &amp; THE FLEET</a:t>
+              <a:t>RATCHET · PART 2/5 · VERBS &amp; THE FLEET</a:t>
             </a:r>
           </a:p>
           <a:p/>
@@ -18471,7 +18515,7 @@
                 </a:solidFill>
                 <a:latin typeface="Consolas"/>
               </a:rPr>
-              <a:t>RATCHET · PART 2/4 · VERBS &amp; THE FLEET</a:t>
+              <a:t>RATCHET · PART 2/5 · VERBS &amp; THE FLEET</a:t>
             </a:r>
           </a:p>
           <a:p/>

--- a/writing/decks/02-verbs-and-the-fleet.pptx
+++ b/writing/decks/02-verbs-and-the-fleet.pptx
@@ -18428,7 +18428,7 @@
               </a:spcAft>
             </a:pPr>
             <a:r>
-              <a:rPr sz="1900" b="1" i="0">
+              <a:rPr sz="1700" b="1" i="0">
                 <a:solidFill>
                   <a:srgbClr val="3D6D7E"/>
                 </a:solidFill>
@@ -18437,7 +18437,7 @@
               <a:t>—  </a:t>
             </a:r>
             <a:r>
-              <a:rPr sz="1900" b="0" i="0">
+              <a:rPr sz="1700" b="0" i="0">
                 <a:solidFill>
                   <a:srgbClr val="1C1E22"/>
                 </a:solidFill>
@@ -18456,7 +18456,7 @@
               </a:spcAft>
             </a:pPr>
             <a:r>
-              <a:rPr sz="1900" b="1" i="0">
+              <a:rPr sz="1700" b="1" i="0">
                 <a:solidFill>
                   <a:srgbClr val="3D6D7E"/>
                 </a:solidFill>
@@ -18465,16 +18465,53 @@
               <a:t>—  </a:t>
             </a:r>
             <a:r>
-              <a:rPr sz="1900" b="1" i="0">
+              <a:rPr sz="1700" b="1" i="0">
                 <a:solidFill>
                   <a:srgbClr val="1C1E22"/>
                 </a:solidFill>
                 <a:latin typeface="Calibri"/>
               </a:rPr>
+              <a:t>failed_retry has a second, unrelated trigger: </a:t>
+            </a:r>
+            <a:r>
+              <a:rPr sz="1700" b="0" i="0">
+                <a:solidFill>
+                  <a:srgbClr val="1C1E22"/>
+                </a:solidFill>
+                <a:latin typeface="Calibri"/>
+              </a:rPr>
+              <a:t>the orchestrator restarting a job that was mid-flight when it crashed. Costs nothing against the strike count — the job wasn't wrong, the process just didn't finish.</a:t>
+            </a:r>
+          </a:p>
+          <a:p>
+            <a:pPr>
+              <a:lnSpc>
+                <a:spcPct val="112000"/>
+              </a:lnSpc>
+              <a:spcAft>
+                <a:spcPts val="1000"/>
+              </a:spcAft>
+            </a:pPr>
+            <a:r>
+              <a:rPr sz="1700" b="1" i="0">
+                <a:solidFill>
+                  <a:srgbClr val="3D6D7E"/>
+                </a:solidFill>
+                <a:latin typeface="Calibri"/>
+              </a:rPr>
+              <a:t>—  </a:t>
+            </a:r>
+            <a:r>
+              <a:rPr sz="1700" b="1" i="0">
+                <a:solidFill>
+                  <a:srgbClr val="1C1E22"/>
+                </a:solidFill>
+                <a:latin typeface="Calibri"/>
+              </a:rPr>
               <a:t>EXECUTE_BEAD is the exception. </a:t>
             </a:r>
             <a:r>
-              <a:rPr sz="1900" b="0" i="0">
+              <a:rPr sz="1700" b="0" i="0">
                 <a:solidFill>
                   <a:srgbClr val="1C1E22"/>
                 </a:solidFill>

--- a/writing/decks/02-verbs-and-the-fleet.pptx
+++ b/writing/decks/02-verbs-and-the-fleet.pptx
@@ -3189,7 +3189,7 @@
                 </a:solidFill>
                 <a:latin typeface="Consolas"/>
               </a:rPr>
-              <a:t>RATCHET · PART 2 OF 5</a:t>
+              <a:t>RATCHET · PART 2 OF 6</a:t>
             </a:r>
           </a:p>
         </p:txBody>
@@ -3301,7 +3301,7 @@
                 </a:solidFill>
                 <a:latin typeface="Calibri"/>
               </a:rPr>
-              <a:t>Part 2 of 5. Quick recap: a design doc gets broken into beads — small, independently verifiable units of work — and each one is driven through a fixed sequence of narrow model calls called verbs. This piece is about how that actually works.</a:t>
+              <a:t>Part 2 of 6. Quick recap: a design doc gets broken into beads — small, independently verifiable units of work — and each one is driven through a fixed sequence of narrow model calls called verbs. This piece is about how that actually works.</a:t>
             </a:r>
           </a:p>
         </p:txBody>
@@ -3491,6 +3491,50 @@
         <p:spPr>
           <a:xfrm>
             <a:off x="2148839" y="6263640"/>
+            <a:ext cx="146304" cy="146304"/>
+          </a:xfrm>
+          <a:prstGeom prst="ellipse">
+            <a:avLst/>
+          </a:prstGeom>
+          <a:solidFill>
+            <a:srgbClr val="3A3E44"/>
+          </a:solidFill>
+          <a:ln>
+            <a:noFill/>
+          </a:ln>
+          <a:effectLst/>
+        </p:spPr>
+        <p:style>
+          <a:lnRef idx="1">
+            <a:schemeClr val="accent1"/>
+          </a:lnRef>
+          <a:fillRef idx="3">
+            <a:schemeClr val="accent1"/>
+          </a:fillRef>
+          <a:effectRef idx="2">
+            <a:schemeClr val="accent1"/>
+          </a:effectRef>
+          <a:fontRef idx="minor">
+            <a:schemeClr val="lt1"/>
+          </a:fontRef>
+        </p:style>
+        <p:txBody>
+          <a:bodyPr rtlCol="0" anchor="ctr"/>
+          <a:lstStyle/>
+          <a:p>
+            <a:pPr algn="ctr"/>
+          </a:p>
+        </p:txBody>
+      </p:sp>
+      <p:sp>
+        <p:nvSpPr>
+          <p:cNvPr id="12" name="Oval 11"/>
+          <p:cNvSpPr/>
+          <p:nvPr/>
+        </p:nvSpPr>
+        <p:spPr>
+          <a:xfrm>
+            <a:off x="2468880" y="6263640"/>
             <a:ext cx="146304" cy="146304"/>
           </a:xfrm>
           <a:prstGeom prst="ellipse">
@@ -3760,7 +3804,7 @@
                 </a:solidFill>
                 <a:latin typeface="Consolas"/>
               </a:rPr>
-              <a:t>RATCHET · PART 2/5 · VERBS &amp; THE FLEET</a:t>
+              <a:t>RATCHET · PART 2/6 · VERBS &amp; THE FLEET</a:t>
             </a:r>
           </a:p>
           <a:p/>
@@ -4984,7 +5028,7 @@
                 </a:solidFill>
                 <a:latin typeface="Consolas"/>
               </a:rPr>
-              <a:t>RATCHET · PART 2/5 · VERBS &amp; THE FLEET</a:t>
+              <a:t>RATCHET · PART 2/6 · VERBS &amp; THE FLEET</a:t>
             </a:r>
           </a:p>
           <a:p/>
@@ -5293,7 +5337,7 @@
                 </a:solidFill>
                 <a:latin typeface="Consolas"/>
               </a:rPr>
-              <a:t>RATCHET · PART 2/5 · VERBS &amp; THE FLEET</a:t>
+              <a:t>RATCHET · PART 2/6 · VERBS &amp; THE FLEET</a:t>
             </a:r>
           </a:p>
           <a:p/>
@@ -5713,7 +5757,7 @@
                 </a:solidFill>
                 <a:latin typeface="Consolas"/>
               </a:rPr>
-              <a:t>RATCHET · PART 2/5 · VERBS &amp; THE FLEET</a:t>
+              <a:t>RATCHET · PART 2/6 · VERBS &amp; THE FLEET</a:t>
             </a:r>
           </a:p>
           <a:p/>
@@ -6114,7 +6158,7 @@
                 </a:solidFill>
                 <a:latin typeface="Consolas"/>
               </a:rPr>
-              <a:t>RATCHET · PART 2/5 · VERBS &amp; THE FLEET</a:t>
+              <a:t>RATCHET · PART 2/6 · VERBS &amp; THE FLEET</a:t>
             </a:r>
           </a:p>
           <a:p/>
@@ -6497,7 +6541,7 @@
                 </a:solidFill>
                 <a:latin typeface="Consolas"/>
               </a:rPr>
-              <a:t>RATCHET · PART 2/5 · VERBS &amp; THE FLEET</a:t>
+              <a:t>RATCHET · PART 2/6 · VERBS &amp; THE FLEET</a:t>
             </a:r>
           </a:p>
           <a:p/>
@@ -6852,7 +6896,7 @@
                 </a:solidFill>
                 <a:latin typeface="Consolas"/>
               </a:rPr>
-              <a:t>RATCHET · PART 2/5 · VERBS &amp; THE FLEET</a:t>
+              <a:t>RATCHET · PART 2/6 · VERBS &amp; THE FLEET</a:t>
             </a:r>
           </a:p>
           <a:p/>
@@ -7430,7 +7474,7 @@
                 </a:solidFill>
                 <a:latin typeface="Consolas"/>
               </a:rPr>
-              <a:t>RATCHET · PART 2/5 · VERBS &amp; THE FLEET</a:t>
+              <a:t>RATCHET · PART 2/6 · VERBS &amp; THE FLEET</a:t>
             </a:r>
           </a:p>
           <a:p/>
@@ -7754,7 +7798,7 @@
                 </a:solidFill>
                 <a:latin typeface="Consolas"/>
               </a:rPr>
-              <a:t>RATCHET · PART 2/5 · VERBS &amp; THE FLEET</a:t>
+              <a:t>RATCHET · PART 2/6 · VERBS &amp; THE FLEET</a:t>
             </a:r>
           </a:p>
           <a:p/>
@@ -8155,7 +8199,7 @@
                 </a:solidFill>
                 <a:latin typeface="Consolas"/>
               </a:rPr>
-              <a:t>RATCHET · PART 2/5 · VERBS &amp; THE FLEET</a:t>
+              <a:t>RATCHET · PART 2/6 · VERBS &amp; THE FLEET</a:t>
             </a:r>
           </a:p>
           <a:p/>
@@ -8547,7 +8591,7 @@
                 </a:solidFill>
                 <a:latin typeface="Consolas"/>
               </a:rPr>
-              <a:t>RATCHET · PART 2/5 · VERBS &amp; THE FLEET</a:t>
+              <a:t>RATCHET · PART 2/6 · VERBS &amp; THE FLEET</a:t>
             </a:r>
           </a:p>
           <a:p/>
@@ -9079,7 +9123,7 @@
                 </a:solidFill>
                 <a:latin typeface="Consolas"/>
               </a:rPr>
-              <a:t>RATCHET · PART 2/5 · VERBS &amp; THE FLEET</a:t>
+              <a:t>RATCHET · PART 2/6 · VERBS &amp; THE FLEET</a:t>
             </a:r>
           </a:p>
           <a:p/>
@@ -9403,7 +9447,7 @@
                 </a:solidFill>
                 <a:latin typeface="Consolas"/>
               </a:rPr>
-              <a:t>RATCHET · PART 2/5 · VERBS &amp; THE FLEET</a:t>
+              <a:t>RATCHET · PART 2/6 · VERBS &amp; THE FLEET</a:t>
             </a:r>
           </a:p>
           <a:p/>
@@ -9712,7 +9756,7 @@
                 </a:solidFill>
                 <a:latin typeface="Consolas"/>
               </a:rPr>
-              <a:t>RATCHET · PART 2/5 · VERBS &amp; THE FLEET</a:t>
+              <a:t>RATCHET · PART 2/6 · VERBS &amp; THE FLEET</a:t>
             </a:r>
           </a:p>
           <a:p/>
@@ -10132,7 +10176,7 @@
                 </a:solidFill>
                 <a:latin typeface="Consolas"/>
               </a:rPr>
-              <a:t>RATCHET · PART 2/5 · VERBS &amp; THE FLEET</a:t>
+              <a:t>RATCHET · PART 2/6 · VERBS &amp; THE FLEET</a:t>
             </a:r>
           </a:p>
           <a:p/>
@@ -10456,7 +10500,7 @@
                 </a:solidFill>
                 <a:latin typeface="Consolas"/>
               </a:rPr>
-              <a:t>RATCHET · PART 2/5 · VERBS &amp; THE FLEET</a:t>
+              <a:t>RATCHET · PART 2/6 · VERBS &amp; THE FLEET</a:t>
             </a:r>
           </a:p>
           <a:p/>
@@ -10867,7 +10911,7 @@
                 </a:solidFill>
                 <a:latin typeface="Consolas"/>
               </a:rPr>
-              <a:t>RATCHET · PART 2/5 · VERBS &amp; THE FLEET</a:t>
+              <a:t>RATCHET · PART 2/6 · VERBS &amp; THE FLEET</a:t>
             </a:r>
           </a:p>
           <a:p/>
@@ -11259,7 +11303,7 @@
                 </a:solidFill>
                 <a:latin typeface="Consolas"/>
               </a:rPr>
-              <a:t>RATCHET · PART 2/5 · VERBS &amp; THE FLEET</a:t>
+              <a:t>RATCHET · PART 2/6 · VERBS &amp; THE FLEET</a:t>
             </a:r>
           </a:p>
           <a:p/>
@@ -11642,7 +11686,7 @@
                 </a:solidFill>
                 <a:latin typeface="Consolas"/>
               </a:rPr>
-              <a:t>RATCHET · PART 2/5 · VERBS &amp; THE FLEET</a:t>
+              <a:t>RATCHET · PART 2/6 · VERBS &amp; THE FLEET</a:t>
             </a:r>
           </a:p>
           <a:p/>
@@ -12025,7 +12069,7 @@
                 </a:solidFill>
                 <a:latin typeface="Consolas"/>
               </a:rPr>
-              <a:t>RATCHET · PART 2/5 · VERBS &amp; THE FLEET</a:t>
+              <a:t>RATCHET · PART 2/6 · VERBS &amp; THE FLEET</a:t>
             </a:r>
           </a:p>
           <a:p/>
@@ -12347,7 +12391,7 @@
                 </a:solidFill>
                 <a:latin typeface="Consolas"/>
               </a:rPr>
-              <a:t>RATCHET · PART 2/5 · VERBS &amp; THE FLEET</a:t>
+              <a:t>RATCHET · PART 2/6 · VERBS &amp; THE FLEET</a:t>
             </a:r>
           </a:p>
         </p:txBody>
@@ -12758,7 +12802,7 @@
                 </a:solidFill>
                 <a:latin typeface="Consolas"/>
               </a:rPr>
-              <a:t>RATCHET · PART 2/5 · VERBS &amp; THE FLEET</a:t>
+              <a:t>RATCHET · PART 2/6 · VERBS &amp; THE FLEET</a:t>
             </a:r>
           </a:p>
           <a:p/>
@@ -13068,7 +13112,7 @@
                 </a:solidFill>
                 <a:latin typeface="Consolas"/>
               </a:rPr>
-              <a:t>RATCHET · PART 2/5 · VERBS &amp; THE FLEET</a:t>
+              <a:t>RATCHET · PART 2/6 · VERBS &amp; THE FLEET</a:t>
             </a:r>
           </a:p>
           <a:p/>
@@ -14310,7 +14354,7 @@
                 </a:solidFill>
                 <a:latin typeface="Consolas"/>
               </a:rPr>
-              <a:t>RATCHET · PART 2/5 · VERBS &amp; THE FLEET</a:t>
+              <a:t>RATCHET · PART 2/6 · VERBS &amp; THE FLEET</a:t>
             </a:r>
           </a:p>
           <a:p/>
@@ -14620,7 +14664,7 @@
                 </a:solidFill>
                 <a:latin typeface="Consolas"/>
               </a:rPr>
-              <a:t>RATCHET · PART 2/5 · VERBS &amp; THE FLEET</a:t>
+              <a:t>RATCHET · PART 2/6 · VERBS &amp; THE FLEET</a:t>
             </a:r>
           </a:p>
           <a:p/>
@@ -16310,7 +16354,7 @@
                 </a:solidFill>
                 <a:latin typeface="Consolas"/>
               </a:rPr>
-              <a:t>RATCHET · PART 2/5 · VERBS &amp; THE FLEET</a:t>
+              <a:t>RATCHET · PART 2/6 · VERBS &amp; THE FLEET</a:t>
             </a:r>
           </a:p>
           <a:p/>
@@ -16620,7 +16664,7 @@
                 </a:solidFill>
                 <a:latin typeface="Consolas"/>
               </a:rPr>
-              <a:t>RATCHET · PART 2/5 · VERBS &amp; THE FLEET</a:t>
+              <a:t>RATCHET · PART 2/6 · VERBS &amp; THE FLEET</a:t>
             </a:r>
           </a:p>
           <a:p/>
@@ -18552,7 +18596,7 @@
                 </a:solidFill>
                 <a:latin typeface="Consolas"/>
               </a:rPr>
-              <a:t>RATCHET · PART 2/5 · VERBS &amp; THE FLEET</a:t>
+              <a:t>RATCHET · PART 2/6 · VERBS &amp; THE FLEET</a:t>
             </a:r>
           </a:p>
           <a:p/>

--- a/writing/decks/02-verbs-and-the-fleet.pptx
+++ b/writing/decks/02-verbs-and-the-fleet.pptx
@@ -5688,13 +5688,22 @@
               <a:t>—  </a:t>
             </a:r>
             <a:r>
+              <a:rPr sz="1700" b="1" i="0">
+                <a:solidFill>
+                  <a:srgbClr val="1C1E22"/>
+                </a:solidFill>
+                <a:latin typeface="Calibri"/>
+              </a:rPr>
+              <a:t>A real call, from the burn-in: </a:t>
+            </a:r>
+            <a:r>
               <a:rPr sz="1700" b="0" i="0">
                 <a:solidFill>
                   <a:srgbClr val="1C1E22"/>
                 </a:solidFill>
                 <a:latin typeface="Calibri"/>
               </a:rPr>
-              <a:t>"This input produces this error" or "these two values are equal" gets tested against a live interpreter, instead of simulated correctly inside the model's head and hoped to be right.</a:t>
+              <a:t>ADJUDICATE, deciding whether a done-indicator renders as the literal word "true" or a CSS class, ran the actual server response through strings.Contains — settling a contradiction no amount of reasoning about the doc's prose could settle on its own.</a:t>
             </a:r>
           </a:p>
           <a:p>
